--- a/decks/hist-renaissance-medicine/hist-renaissance-medicine_ch3_spreading-ideas.pptx
+++ b/decks/hist-renaissance-medicine/hist-renaissance-medicine_ch3_spreading-ideas.pptx
@@ -130,31 +130,31 @@
   <p:extLst>
     <p:ext uri="{521415D9-36F7-43E2-AB2F-B90AF26B5E84}">
       <p14:sectionLst xmlns:p14="http://schemas.microsoft.com/office/powerpoint/2010/main">
-        <p14:section name="Opening" id="{f3742aa0-0f63-9662-ff3d-46f588ff749c}">
+        <p14:section name="Opening" id="{2794a3fb-8b76-2882-ef79-482c1a59ffb1}">
           <p14:sldIdLst>
             <p14:sldId id="256"/>
           </p14:sldIdLst>
         </p14:section>
-        <p14:section name="Gate" id="{9dacb579-5e63-d3ef-ec8b-914af4de1a4e}">
+        <p14:section name="Gate" id="{3711ed11-d6bd-e5e6-82e5-0efef00c7dc1}">
           <p14:sldIdLst>
             <p14:sldId id="257"/>
             <p14:sldId id="258"/>
             <p14:sldId id="259"/>
           </p14:sldIdLst>
         </p14:section>
-        <p14:section name="Pre-teach" id="{e87e8af5-33c6-8db6-f182-13fb1f7f7da6}">
+        <p14:section name="Pre-teach" id="{57344c50-3bfd-77ab-32f5-0071a244a0cd}">
           <p14:sldIdLst>
             <p14:sldId id="260"/>
             <p14:sldId id="261"/>
           </p14:sldIdLst>
         </p14:section>
-        <p14:section name="Read-along" id="{fb1a5c6f-59f0-4707-67b8-97b6237c920b}">
+        <p14:section name="Read-along" id="{fb590719-dba1-73fe-96ab-5e99b6cc7bb1}">
           <p14:sldIdLst>
             <p14:sldId id="262"/>
             <p14:sldId id="263"/>
           </p14:sldIdLst>
         </p14:section>
-        <p14:section name="Teach" id="{5fffe926-d141-d329-71a3-a7fb552039f6}">
+        <p14:section name="Teach" id="{bc7ce8ac-6163-152d-7db7-24c25eab3495}">
           <p14:sldIdLst>
             <p14:sldId id="264"/>
             <p14:sldId id="265"/>
@@ -164,7 +164,7 @@
             <p14:sldId id="269"/>
           </p14:sldIdLst>
         </p14:section>
-        <p14:section name="Routes" id="{06f4096f-8455-feca-9729-11b0507632af}">
+        <p14:section name="Routes" id="{68add3b3-a611-b8eb-c293-7c079fa4836a}">
           <p14:sldIdLst>
             <p14:sldId id="270"/>
             <p14:sldId id="271"/>
@@ -174,12 +174,12 @@
             <p14:sldId id="275"/>
           </p14:sldIdLst>
         </p14:section>
-        <p14:section name="Close" id="{09c9ff97-b5be-e3d1-0605-cdad0482eb42}">
+        <p14:section name="Close" id="{1b4871a2-4295-e8b3-e2da-6453a9ba2021}">
           <p14:sldIdLst>
             <p14:sldId id="276"/>
           </p14:sldIdLst>
         </p14:section>
-        <p14:section name="Answers" id="{da3bb7de-dab9-32fc-34b5-9d0d36fbac39}">
+        <p14:section name="Answers" id="{db261a10-281c-47eb-52e1-9012dd1ba820}">
           <p14:sldIdLst>
             <p14:sldId id="277"/>
             <p14:sldId id="278"/>
